--- a/Untitled 1.pptx
+++ b/Untitled 1.pptx
@@ -1,19 +1,114 @@
 
 <file path=ppt/presentation.xml><?xml version="1.0" encoding="utf-8"?>
-<p:presentation xmlns:a="http://schemas.openxmlformats.org/drawingml/2006/main" xmlns:p="http://schemas.openxmlformats.org/presentationml/2006/main" xmlns:r="http://schemas.openxmlformats.org/officeDocument/2006/relationships" xmlns:p14="http://schemas.microsoft.com/office/powerpoint/2010/main" xmlns:p15="http://schemas.microsoft.com/office/powerpoint/2012/main" xmlns:mc="http://schemas.openxmlformats.org/markup-compatibility/2006">
+<p:presentation xmlns:a="http://schemas.openxmlformats.org/drawingml/2006/main" xmlns:r="http://schemas.openxmlformats.org/officeDocument/2006/relationships" xmlns:p="http://schemas.openxmlformats.org/presentationml/2006/main">
   <p:sldMasterIdLst>
-    <p:sldMasterId id="2147483648" r:id="rId2"/>
+    <p:sldMasterId id="2147483648" r:id="rId1"/>
   </p:sldMasterIdLst>
   <p:sldIdLst>
-    <p:sldId id="256" r:id="rId3"/>
+    <p:sldId id="256" r:id="rId2"/>
   </p:sldIdLst>
   <p:sldSz cx="10080625" cy="5670550"/>
   <p:notesSz cx="7559675" cy="10691813"/>
+  <p:defaultTextStyle>
+    <a:defPPr>
+      <a:defRPr lang="es-CL"/>
+    </a:defPPr>
+    <a:lvl1pPr marL="0" algn="l" defTabSz="914400" rtl="0" eaLnBrk="1" latinLnBrk="0" hangingPunct="1">
+      <a:defRPr sz="1800" kern="1200">
+        <a:solidFill>
+          <a:schemeClr val="tx1"/>
+        </a:solidFill>
+        <a:latin typeface="+mn-lt"/>
+        <a:ea typeface="+mn-ea"/>
+        <a:cs typeface="+mn-cs"/>
+      </a:defRPr>
+    </a:lvl1pPr>
+    <a:lvl2pPr marL="457200" algn="l" defTabSz="914400" rtl="0" eaLnBrk="1" latinLnBrk="0" hangingPunct="1">
+      <a:defRPr sz="1800" kern="1200">
+        <a:solidFill>
+          <a:schemeClr val="tx1"/>
+        </a:solidFill>
+        <a:latin typeface="+mn-lt"/>
+        <a:ea typeface="+mn-ea"/>
+        <a:cs typeface="+mn-cs"/>
+      </a:defRPr>
+    </a:lvl2pPr>
+    <a:lvl3pPr marL="914400" algn="l" defTabSz="914400" rtl="0" eaLnBrk="1" latinLnBrk="0" hangingPunct="1">
+      <a:defRPr sz="1800" kern="1200">
+        <a:solidFill>
+          <a:schemeClr val="tx1"/>
+        </a:solidFill>
+        <a:latin typeface="+mn-lt"/>
+        <a:ea typeface="+mn-ea"/>
+        <a:cs typeface="+mn-cs"/>
+      </a:defRPr>
+    </a:lvl3pPr>
+    <a:lvl4pPr marL="1371600" algn="l" defTabSz="914400" rtl="0" eaLnBrk="1" latinLnBrk="0" hangingPunct="1">
+      <a:defRPr sz="1800" kern="1200">
+        <a:solidFill>
+          <a:schemeClr val="tx1"/>
+        </a:solidFill>
+        <a:latin typeface="+mn-lt"/>
+        <a:ea typeface="+mn-ea"/>
+        <a:cs typeface="+mn-cs"/>
+      </a:defRPr>
+    </a:lvl4pPr>
+    <a:lvl5pPr marL="1828800" algn="l" defTabSz="914400" rtl="0" eaLnBrk="1" latinLnBrk="0" hangingPunct="1">
+      <a:defRPr sz="1800" kern="1200">
+        <a:solidFill>
+          <a:schemeClr val="tx1"/>
+        </a:solidFill>
+        <a:latin typeface="+mn-lt"/>
+        <a:ea typeface="+mn-ea"/>
+        <a:cs typeface="+mn-cs"/>
+      </a:defRPr>
+    </a:lvl5pPr>
+    <a:lvl6pPr marL="2286000" algn="l" defTabSz="914400" rtl="0" eaLnBrk="1" latinLnBrk="0" hangingPunct="1">
+      <a:defRPr sz="1800" kern="1200">
+        <a:solidFill>
+          <a:schemeClr val="tx1"/>
+        </a:solidFill>
+        <a:latin typeface="+mn-lt"/>
+        <a:ea typeface="+mn-ea"/>
+        <a:cs typeface="+mn-cs"/>
+      </a:defRPr>
+    </a:lvl6pPr>
+    <a:lvl7pPr marL="2743200" algn="l" defTabSz="914400" rtl="0" eaLnBrk="1" latinLnBrk="0" hangingPunct="1">
+      <a:defRPr sz="1800" kern="1200">
+        <a:solidFill>
+          <a:schemeClr val="tx1"/>
+        </a:solidFill>
+        <a:latin typeface="+mn-lt"/>
+        <a:ea typeface="+mn-ea"/>
+        <a:cs typeface="+mn-cs"/>
+      </a:defRPr>
+    </a:lvl7pPr>
+    <a:lvl8pPr marL="3200400" algn="l" defTabSz="914400" rtl="0" eaLnBrk="1" latinLnBrk="0" hangingPunct="1">
+      <a:defRPr sz="1800" kern="1200">
+        <a:solidFill>
+          <a:schemeClr val="tx1"/>
+        </a:solidFill>
+        <a:latin typeface="+mn-lt"/>
+        <a:ea typeface="+mn-ea"/>
+        <a:cs typeface="+mn-cs"/>
+      </a:defRPr>
+    </a:lvl8pPr>
+    <a:lvl9pPr marL="3657600" algn="l" defTabSz="914400" rtl="0" eaLnBrk="1" latinLnBrk="0" hangingPunct="1">
+      <a:defRPr sz="1800" kern="1200">
+        <a:solidFill>
+          <a:schemeClr val="tx1"/>
+        </a:solidFill>
+        <a:latin typeface="+mn-lt"/>
+        <a:ea typeface="+mn-ea"/>
+        <a:cs typeface="+mn-cs"/>
+      </a:defRPr>
+    </a:lvl9pPr>
+  </p:defaultTextStyle>
 </p:presentation>
 </file>
 
 <file path=ppt/slideLayouts/slideLayout1.xml><?xml version="1.0" encoding="utf-8"?>
-<p:sldLayout xmlns:a="http://schemas.openxmlformats.org/drawingml/2006/main" xmlns:p="http://schemas.openxmlformats.org/presentationml/2006/main" xmlns:r="http://schemas.openxmlformats.org/officeDocument/2006/relationships" xmlns:p14="http://schemas.microsoft.com/office/powerpoint/2010/main" xmlns:p15="http://schemas.microsoft.com/office/powerpoint/2012/main" xmlns:mc="http://schemas.openxmlformats.org/markup-compatibility/2006" type="title" preserve="1">
+<p:sldLayout xmlns:a="http://schemas.openxmlformats.org/drawingml/2006/main" xmlns:r="http://schemas.openxmlformats.org/officeDocument/2006/relationships" xmlns:p="http://schemas.openxmlformats.org/presentationml/2006/main" type="title" preserve="1">
   <p:cSld name="Metropolis">
     <p:spTree>
       <p:nvGrpSpPr>
@@ -53,16 +148,17 @@
           </a:ln>
         </p:spPr>
         <p:txBody>
-          <a:bodyPr lIns="0" rIns="0" tIns="0" bIns="0" anchor="ctr">
+          <a:bodyPr lIns="0" tIns="0" rIns="0" bIns="0" anchor="ctr">
             <a:normAutofit/>
           </a:bodyPr>
+          <a:lstStyle/>
           <a:p>
             <a:pPr indent="0" algn="ctr">
               <a:buNone/>
             </a:pPr>
             <a:endParaRPr lang="es-CL" sz="3300" b="0" u="none" strike="noStrike">
               <a:solidFill>
-                <a:srgbClr val="ffffff"/>
+                <a:srgbClr val="FFFFFF"/>
               </a:solidFill>
               <a:effectLst/>
               <a:uFillTx/>
@@ -95,16 +191,17 @@
           </a:ln>
         </p:spPr>
         <p:txBody>
-          <a:bodyPr lIns="0" rIns="0" tIns="0" bIns="0" anchor="ctr">
+          <a:bodyPr lIns="0" tIns="0" rIns="0" bIns="0" anchor="ctr">
             <a:spAutoFit/>
           </a:bodyPr>
+          <a:lstStyle/>
           <a:p>
             <a:pPr indent="0" algn="ctr">
               <a:buNone/>
             </a:pPr>
             <a:endParaRPr lang="es-CL" sz="3200" b="0" u="none" strike="noStrike">
               <a:solidFill>
-                <a:srgbClr val="ffffff"/>
+                <a:srgbClr val="FFFFFF"/>
               </a:solidFill>
               <a:effectLst/>
               <a:uFillTx/>
@@ -126,6 +223,7 @@
         <p:spPr/>
         <p:txBody>
           <a:bodyPr/>
+          <a:lstStyle/>
           <a:p>
             <a:r>
               <a:t>Footer</a:t>
@@ -146,10 +244,12 @@
         <p:spPr/>
         <p:txBody>
           <a:bodyPr/>
+          <a:lstStyle/>
           <a:p>
             <a:fld id="{5C9CBA5B-CAAE-44FA-A06E-71CA725F69E2}" type="slidenum">
-              <a:t>&lt;#&gt;</a:t>
+              <a:t>‹Nº›</a:t>
             </a:fld>
+            <a:endParaRPr/>
           </a:p>
         </p:txBody>
       </p:sp>
@@ -166,22 +266,28 @@
         <p:spPr/>
         <p:txBody>
           <a:bodyPr/>
-          <a:p>
-            <a:r>
-              <a:rPr lang="es-CL"/>
-              <a:t/>
-            </a:r>
+          <a:lstStyle/>
+          <a:p>
+            <a:endParaRPr/>
           </a:p>
         </p:txBody>
       </p:sp>
     </p:spTree>
   </p:cSld>
+  <p:clrMapOvr>
+    <a:masterClrMapping/>
+  </p:clrMapOvr>
 </p:sldLayout>
 </file>
 
 <file path=ppt/slideMasters/slideMaster1.xml><?xml version="1.0" encoding="utf-8"?>
-<p:sldMaster xmlns:a="http://schemas.openxmlformats.org/drawingml/2006/main" xmlns:p="http://schemas.openxmlformats.org/presentationml/2006/main" xmlns:r="http://schemas.openxmlformats.org/officeDocument/2006/relationships" xmlns:p14="http://schemas.microsoft.com/office/powerpoint/2010/main" xmlns:p15="http://schemas.microsoft.com/office/powerpoint/2012/main" xmlns:mc="http://schemas.openxmlformats.org/markup-compatibility/2006">
+<p:sldMaster xmlns:a="http://schemas.openxmlformats.org/drawingml/2006/main" xmlns:r="http://schemas.openxmlformats.org/officeDocument/2006/relationships" xmlns:p="http://schemas.openxmlformats.org/presentationml/2006/main">
   <p:cSld>
+    <p:bg>
+      <p:bgRef idx="1001">
+        <a:schemeClr val="bg1"/>
+      </p:bgRef>
+    </p:bg>
     <p:spTree>
       <p:nvGrpSpPr>
         <p:cNvPr id="1" name=""/>
@@ -198,15 +304,15 @@
       </p:grpSpPr>
       <p:pic>
         <p:nvPicPr>
-          <p:cNvPr id="2" name=""/>
+          <p:cNvPr id="2" name="Gráfico 1"/>
           <p:cNvPicPr/>
           <p:nvPr/>
         </p:nvPicPr>
         <p:blipFill>
-          <a:blip r:embed="rId2">
+          <a:blip r:embed="rId3">
             <a:extLst>
               <a:ext uri="{96DAC541-7B7A-43D3-8B79-37D633B846F1}">
-                <asvg:svgBlip xmlns:asvg="http://schemas.microsoft.com/office/drawing/2016/SVG/main" r:embed="rId3"/>
+                <asvg:svgBlip xmlns:asvg="http://schemas.microsoft.com/office/drawing/2016/SVG/main" r:embed="rId4"/>
               </a:ext>
             </a:extLst>
           </a:blip>
@@ -250,9 +356,10 @@
           </a:ln>
         </p:spPr>
         <p:txBody>
-          <a:bodyPr lIns="0" rIns="0" tIns="0" bIns="0" anchor="ctr">
+          <a:bodyPr lIns="0" tIns="0" rIns="0" bIns="0" anchor="ctr">
             <a:normAutofit fontScale="85000" lnSpcReduction="9999"/>
           </a:bodyPr>
+          <a:lstStyle/>
           <a:p>
             <a:pPr indent="0" algn="ctr">
               <a:buNone/>
@@ -260,7 +367,7 @@
             <a:r>
               <a:rPr lang="es-CL" sz="3300" b="0" u="none" strike="noStrike">
                 <a:solidFill>
-                  <a:srgbClr val="ffffff"/>
+                  <a:srgbClr val="FFFFFF"/>
                 </a:solidFill>
                 <a:effectLst/>
                 <a:uFillTx/>
@@ -268,14 +375,6 @@
               </a:rPr>
               <a:t>Click to edit the title text format</a:t>
             </a:r>
-            <a:endParaRPr lang="es-CL" sz="3300" b="0" u="none" strike="noStrike">
-              <a:solidFill>
-                <a:srgbClr val="ffffff"/>
-              </a:solidFill>
-              <a:effectLst/>
-              <a:uFillTx/>
-              <a:latin typeface="Arial"/>
-            </a:endParaRPr>
           </a:p>
         </p:txBody>
       </p:sp>
@@ -303,16 +402,17 @@
           </a:ln>
         </p:spPr>
         <p:txBody>
-          <a:bodyPr lIns="0" rIns="0" tIns="0" bIns="0" anchor="t">
+          <a:bodyPr lIns="0" tIns="0" rIns="0" bIns="0" anchor="t">
             <a:normAutofit/>
           </a:bodyPr>
+          <a:lstStyle/>
           <a:p>
             <a:pPr marL="432000" indent="-324000">
               <a:spcAft>
                 <a:spcPts val="1060"/>
               </a:spcAft>
               <a:buClr>
-                <a:srgbClr val="ffffff"/>
+                <a:srgbClr val="FFFFFF"/>
               </a:buClr>
               <a:buSzPct val="45000"/>
               <a:buFont typeface="Wingdings" charset="2"/>
@@ -321,7 +421,7 @@
             <a:r>
               <a:rPr lang="es-CL" sz="2400" b="0" u="none" strike="noStrike">
                 <a:solidFill>
-                  <a:srgbClr val="ffffff"/>
+                  <a:srgbClr val="FFFFFF"/>
                 </a:solidFill>
                 <a:effectLst/>
                 <a:uFillTx/>
@@ -329,14 +429,6 @@
               </a:rPr>
               <a:t>Click to edit the outline text format</a:t>
             </a:r>
-            <a:endParaRPr lang="es-CL" sz="2400" b="0" u="none" strike="noStrike">
-              <a:solidFill>
-                <a:srgbClr val="ffffff"/>
-              </a:solidFill>
-              <a:effectLst/>
-              <a:uFillTx/>
-              <a:latin typeface="Arial"/>
-            </a:endParaRPr>
           </a:p>
           <a:p>
             <a:pPr marL="864000" lvl="1" indent="-324000">
@@ -344,7 +436,7 @@
                 <a:spcPts val="848"/>
               </a:spcAft>
               <a:buClr>
-                <a:srgbClr val="ffffff"/>
+                <a:srgbClr val="FFFFFF"/>
               </a:buClr>
               <a:buSzPct val="75000"/>
               <a:buFont typeface="Symbol" charset="2"/>
@@ -353,7 +445,7 @@
             <a:r>
               <a:rPr lang="es-CL" sz="2100" b="0" u="none" strike="noStrike">
                 <a:solidFill>
-                  <a:srgbClr val="ffffff"/>
+                  <a:srgbClr val="FFFFFF"/>
                 </a:solidFill>
                 <a:effectLst/>
                 <a:uFillTx/>
@@ -361,14 +453,6 @@
               </a:rPr>
               <a:t>Second Outline Level</a:t>
             </a:r>
-            <a:endParaRPr lang="es-CL" sz="2100" b="0" u="none" strike="noStrike">
-              <a:solidFill>
-                <a:srgbClr val="ffffff"/>
-              </a:solidFill>
-              <a:effectLst/>
-              <a:uFillTx/>
-              <a:latin typeface="Arial"/>
-            </a:endParaRPr>
           </a:p>
           <a:p>
             <a:pPr marL="1296000" lvl="2" indent="-288000">
@@ -376,7 +460,7 @@
                 <a:spcPts val="635"/>
               </a:spcAft>
               <a:buClr>
-                <a:srgbClr val="ffffff"/>
+                <a:srgbClr val="FFFFFF"/>
               </a:buClr>
               <a:buSzPct val="45000"/>
               <a:buFont typeface="Wingdings" charset="2"/>
@@ -385,7 +469,7 @@
             <a:r>
               <a:rPr lang="es-CL" sz="1800" b="0" u="none" strike="noStrike">
                 <a:solidFill>
-                  <a:srgbClr val="ffffff"/>
+                  <a:srgbClr val="FFFFFF"/>
                 </a:solidFill>
                 <a:effectLst/>
                 <a:uFillTx/>
@@ -393,14 +477,6 @@
               </a:rPr>
               <a:t>Third Outline Level</a:t>
             </a:r>
-            <a:endParaRPr lang="es-CL" sz="1800" b="0" u="none" strike="noStrike">
-              <a:solidFill>
-                <a:srgbClr val="ffffff"/>
-              </a:solidFill>
-              <a:effectLst/>
-              <a:uFillTx/>
-              <a:latin typeface="Arial"/>
-            </a:endParaRPr>
           </a:p>
           <a:p>
             <a:pPr marL="1728000" lvl="3" indent="-216000">
@@ -408,7 +484,7 @@
                 <a:spcPts val="422"/>
               </a:spcAft>
               <a:buClr>
-                <a:srgbClr val="ffffff"/>
+                <a:srgbClr val="FFFFFF"/>
               </a:buClr>
               <a:buSzPct val="75000"/>
               <a:buFont typeface="Symbol" charset="2"/>
@@ -417,7 +493,7 @@
             <a:r>
               <a:rPr lang="es-CL" sz="1500" b="0" u="none" strike="noStrike">
                 <a:solidFill>
-                  <a:srgbClr val="ffffff"/>
+                  <a:srgbClr val="FFFFFF"/>
                 </a:solidFill>
                 <a:effectLst/>
                 <a:uFillTx/>
@@ -425,14 +501,6 @@
               </a:rPr>
               <a:t>Fourth Outline Level</a:t>
             </a:r>
-            <a:endParaRPr lang="es-CL" sz="1500" b="0" u="none" strike="noStrike">
-              <a:solidFill>
-                <a:srgbClr val="ffffff"/>
-              </a:solidFill>
-              <a:effectLst/>
-              <a:uFillTx/>
-              <a:latin typeface="Arial"/>
-            </a:endParaRPr>
           </a:p>
           <a:p>
             <a:pPr marL="2160000" lvl="4" indent="-216000">
@@ -440,7 +508,7 @@
                 <a:spcPts val="210"/>
               </a:spcAft>
               <a:buClr>
-                <a:srgbClr val="ffffff"/>
+                <a:srgbClr val="FFFFFF"/>
               </a:buClr>
               <a:buSzPct val="45000"/>
               <a:buFont typeface="Wingdings" charset="2"/>
@@ -449,7 +517,7 @@
             <a:r>
               <a:rPr lang="es-CL" sz="1500" b="0" u="none" strike="noStrike">
                 <a:solidFill>
-                  <a:srgbClr val="ffffff"/>
+                  <a:srgbClr val="FFFFFF"/>
                 </a:solidFill>
                 <a:effectLst/>
                 <a:uFillTx/>
@@ -457,14 +525,6 @@
               </a:rPr>
               <a:t>Fifth Outline Level</a:t>
             </a:r>
-            <a:endParaRPr lang="es-CL" sz="1500" b="0" u="none" strike="noStrike">
-              <a:solidFill>
-                <a:srgbClr val="ffffff"/>
-              </a:solidFill>
-              <a:effectLst/>
-              <a:uFillTx/>
-              <a:latin typeface="Arial"/>
-            </a:endParaRPr>
           </a:p>
           <a:p>
             <a:pPr marL="2592000" lvl="5" indent="-216000">
@@ -472,7 +532,7 @@
                 <a:spcPts val="210"/>
               </a:spcAft>
               <a:buClr>
-                <a:srgbClr val="ffffff"/>
+                <a:srgbClr val="FFFFFF"/>
               </a:buClr>
               <a:buSzPct val="45000"/>
               <a:buFont typeface="Wingdings" charset="2"/>
@@ -481,7 +541,7 @@
             <a:r>
               <a:rPr lang="es-CL" sz="1500" b="0" u="none" strike="noStrike">
                 <a:solidFill>
-                  <a:srgbClr val="ffffff"/>
+                  <a:srgbClr val="FFFFFF"/>
                 </a:solidFill>
                 <a:effectLst/>
                 <a:uFillTx/>
@@ -489,14 +549,6 @@
               </a:rPr>
               <a:t>Sixth Outline Level</a:t>
             </a:r>
-            <a:endParaRPr lang="es-CL" sz="1500" b="0" u="none" strike="noStrike">
-              <a:solidFill>
-                <a:srgbClr val="ffffff"/>
-              </a:solidFill>
-              <a:effectLst/>
-              <a:uFillTx/>
-              <a:latin typeface="Arial"/>
-            </a:endParaRPr>
           </a:p>
           <a:p>
             <a:pPr marL="3024000" lvl="6" indent="-216000">
@@ -504,7 +556,7 @@
                 <a:spcPts val="210"/>
               </a:spcAft>
               <a:buClr>
-                <a:srgbClr val="ffffff"/>
+                <a:srgbClr val="FFFFFF"/>
               </a:buClr>
               <a:buSzPct val="45000"/>
               <a:buFont typeface="Wingdings" charset="2"/>
@@ -513,7 +565,7 @@
             <a:r>
               <a:rPr lang="es-CL" sz="1500" b="0" u="none" strike="noStrike">
                 <a:solidFill>
-                  <a:srgbClr val="ffffff"/>
+                  <a:srgbClr val="FFFFFF"/>
                 </a:solidFill>
                 <a:effectLst/>
                 <a:uFillTx/>
@@ -521,14 +573,6 @@
               </a:rPr>
               <a:t>Seventh Outline Level</a:t>
             </a:r>
-            <a:endParaRPr lang="es-CL" sz="1500" b="0" u="none" strike="noStrike">
-              <a:solidFill>
-                <a:srgbClr val="ffffff"/>
-              </a:solidFill>
-              <a:effectLst/>
-              <a:uFillTx/>
-              <a:latin typeface="Arial"/>
-            </a:endParaRPr>
           </a:p>
         </p:txBody>
       </p:sp>
@@ -556,7 +600,7 @@
           </a:ln>
         </p:spPr>
         <p:txBody>
-          <a:bodyPr lIns="0" rIns="0" tIns="0" bIns="0" anchor="t">
+          <a:bodyPr lIns="0" tIns="0" rIns="0" bIns="0" anchor="t">
             <a:spAutoFit/>
           </a:bodyPr>
           <a:lstStyle>
@@ -564,7 +608,7 @@
               <a:buNone/>
               <a:defRPr lang="es-CL" sz="1400" b="0" u="none" strike="noStrike">
                 <a:solidFill>
-                  <a:srgbClr val="ffffff"/>
+                  <a:srgbClr val="FFFFFF"/>
                 </a:solidFill>
                 <a:effectLst/>
                 <a:uFillTx/>
@@ -579,7 +623,7 @@
             <a:r>
               <a:rPr lang="es-CL" sz="1400" b="0" u="none" strike="noStrike">
                 <a:solidFill>
-                  <a:srgbClr val="ffffff"/>
+                  <a:srgbClr val="FFFFFF"/>
                 </a:solidFill>
                 <a:effectLst/>
                 <a:uFillTx/>
@@ -587,14 +631,6 @@
               </a:rPr>
               <a:t>&lt;date/time&gt;</a:t>
             </a:r>
-            <a:endParaRPr lang="es-CL" sz="1400" b="0" u="none" strike="noStrike">
-              <a:solidFill>
-                <a:srgbClr val="ffffff"/>
-              </a:solidFill>
-              <a:effectLst/>
-              <a:uFillTx/>
-              <a:latin typeface="Arial"/>
-            </a:endParaRPr>
           </a:p>
         </p:txBody>
       </p:sp>
@@ -622,7 +658,7 @@
           </a:ln>
         </p:spPr>
         <p:txBody>
-          <a:bodyPr lIns="0" rIns="0" tIns="0" bIns="0" anchor="t">
+          <a:bodyPr lIns="0" tIns="0" rIns="0" bIns="0" anchor="t">
             <a:spAutoFit/>
           </a:bodyPr>
           <a:lstStyle>
@@ -630,7 +666,7 @@
               <a:buNone/>
               <a:defRPr lang="es-CL" sz="1400" b="0" u="none" strike="noStrike">
                 <a:solidFill>
-                  <a:srgbClr val="ffffff"/>
+                  <a:srgbClr val="FFFFFF"/>
                 </a:solidFill>
                 <a:effectLst/>
                 <a:uFillTx/>
@@ -645,7 +681,7 @@
             <a:r>
               <a:rPr lang="es-CL" sz="1400" b="0" u="none" strike="noStrike">
                 <a:solidFill>
-                  <a:srgbClr val="ffffff"/>
+                  <a:srgbClr val="FFFFFF"/>
                 </a:solidFill>
                 <a:effectLst/>
                 <a:uFillTx/>
@@ -653,14 +689,6 @@
               </a:rPr>
               <a:t>&lt;footer&gt;</a:t>
             </a:r>
-            <a:endParaRPr lang="es-CL" sz="1400" b="0" u="none" strike="noStrike">
-              <a:solidFill>
-                <a:srgbClr val="ffffff"/>
-              </a:solidFill>
-              <a:effectLst/>
-              <a:uFillTx/>
-              <a:latin typeface="Arial"/>
-            </a:endParaRPr>
           </a:p>
         </p:txBody>
       </p:sp>
@@ -688,7 +716,7 @@
           </a:ln>
         </p:spPr>
         <p:txBody>
-          <a:bodyPr lIns="0" rIns="0" tIns="0" bIns="0" anchor="t">
+          <a:bodyPr lIns="0" tIns="0" rIns="0" bIns="0" anchor="t">
             <a:spAutoFit/>
           </a:bodyPr>
           <a:lstStyle>
@@ -696,7 +724,7 @@
               <a:buNone/>
               <a:defRPr lang="es-CL" sz="1400" b="0" u="none" strike="noStrike">
                 <a:solidFill>
-                  <a:srgbClr val="ffffff"/>
+                  <a:srgbClr val="FFFFFF"/>
                 </a:solidFill>
                 <a:effectLst/>
                 <a:uFillTx/>
@@ -711,17 +739,17 @@
             <a:fld id="{A51334DA-69A9-414A-9F14-759029CB5AFC}" type="slidenum">
               <a:rPr lang="es-CL" sz="1400" b="0" u="none" strike="noStrike">
                 <a:solidFill>
-                  <a:srgbClr val="ffffff"/>
-                </a:solidFill>
-                <a:effectLst/>
-                <a:uFillTx/>
-                <a:latin typeface="Arial"/>
-              </a:rPr>
-              <a:t>&lt;number&gt;</a:t>
+                  <a:srgbClr val="FFFFFF"/>
+                </a:solidFill>
+                <a:effectLst/>
+                <a:uFillTx/>
+                <a:latin typeface="Arial"/>
+              </a:rPr>
+              <a:t>‹Nº›</a:t>
             </a:fld>
             <a:endParaRPr lang="es-CL" sz="1400" b="0" u="none" strike="noStrike">
               <a:solidFill>
-                <a:srgbClr val="ffffff"/>
+                <a:srgbClr val="FFFFFF"/>
               </a:solidFill>
               <a:effectLst/>
               <a:uFillTx/>
@@ -734,13 +762,293 @@
   </p:cSld>
   <p:clrMap bg1="lt1" tx1="dk1" bg2="lt2" tx2="dk2" accent1="accent1" accent2="accent2" accent3="accent3" accent4="accent4" accent5="accent5" accent6="accent6" hlink="hlink" folHlink="folHlink"/>
   <p:sldLayoutIdLst>
-    <p:sldLayoutId id="2147483649" r:id="rId4"/>
+    <p:sldLayoutId id="2147483649" r:id="rId1"/>
   </p:sldLayoutIdLst>
+  <p:txStyles>
+    <p:titleStyle>
+      <a:lvl1pPr algn="l" defTabSz="914400" rtl="0" eaLnBrk="1" latinLnBrk="0" hangingPunct="1">
+        <a:lnSpc>
+          <a:spcPct val="90000"/>
+        </a:lnSpc>
+        <a:spcBef>
+          <a:spcPct val="0"/>
+        </a:spcBef>
+        <a:buNone/>
+        <a:defRPr sz="4400" kern="1200">
+          <a:solidFill>
+            <a:schemeClr val="tx1"/>
+          </a:solidFill>
+          <a:latin typeface="+mj-lt"/>
+          <a:ea typeface="+mj-ea"/>
+          <a:cs typeface="+mj-cs"/>
+        </a:defRPr>
+      </a:lvl1pPr>
+    </p:titleStyle>
+    <p:bodyStyle>
+      <a:lvl1pPr marL="228600" indent="-228600" algn="l" defTabSz="914400" rtl="0" eaLnBrk="1" latinLnBrk="0" hangingPunct="1">
+        <a:lnSpc>
+          <a:spcPct val="90000"/>
+        </a:lnSpc>
+        <a:spcBef>
+          <a:spcPts val="1000"/>
+        </a:spcBef>
+        <a:buFont typeface="Arial" panose="020B0604020202020204" pitchFamily="34" charset="0"/>
+        <a:buChar char="•"/>
+        <a:defRPr sz="2800" kern="1200">
+          <a:solidFill>
+            <a:schemeClr val="tx1"/>
+          </a:solidFill>
+          <a:latin typeface="+mn-lt"/>
+          <a:ea typeface="+mn-ea"/>
+          <a:cs typeface="+mn-cs"/>
+        </a:defRPr>
+      </a:lvl1pPr>
+      <a:lvl2pPr marL="685800" indent="-228600" algn="l" defTabSz="914400" rtl="0" eaLnBrk="1" latinLnBrk="0" hangingPunct="1">
+        <a:lnSpc>
+          <a:spcPct val="90000"/>
+        </a:lnSpc>
+        <a:spcBef>
+          <a:spcPts val="500"/>
+        </a:spcBef>
+        <a:buFont typeface="Arial" panose="020B0604020202020204" pitchFamily="34" charset="0"/>
+        <a:buChar char="•"/>
+        <a:defRPr sz="2400" kern="1200">
+          <a:solidFill>
+            <a:schemeClr val="tx1"/>
+          </a:solidFill>
+          <a:latin typeface="+mn-lt"/>
+          <a:ea typeface="+mn-ea"/>
+          <a:cs typeface="+mn-cs"/>
+        </a:defRPr>
+      </a:lvl2pPr>
+      <a:lvl3pPr marL="1143000" indent="-228600" algn="l" defTabSz="914400" rtl="0" eaLnBrk="1" latinLnBrk="0" hangingPunct="1">
+        <a:lnSpc>
+          <a:spcPct val="90000"/>
+        </a:lnSpc>
+        <a:spcBef>
+          <a:spcPts val="500"/>
+        </a:spcBef>
+        <a:buFont typeface="Arial" panose="020B0604020202020204" pitchFamily="34" charset="0"/>
+        <a:buChar char="•"/>
+        <a:defRPr sz="2000" kern="1200">
+          <a:solidFill>
+            <a:schemeClr val="tx1"/>
+          </a:solidFill>
+          <a:latin typeface="+mn-lt"/>
+          <a:ea typeface="+mn-ea"/>
+          <a:cs typeface="+mn-cs"/>
+        </a:defRPr>
+      </a:lvl3pPr>
+      <a:lvl4pPr marL="1600200" indent="-228600" algn="l" defTabSz="914400" rtl="0" eaLnBrk="1" latinLnBrk="0" hangingPunct="1">
+        <a:lnSpc>
+          <a:spcPct val="90000"/>
+        </a:lnSpc>
+        <a:spcBef>
+          <a:spcPts val="500"/>
+        </a:spcBef>
+        <a:buFont typeface="Arial" panose="020B0604020202020204" pitchFamily="34" charset="0"/>
+        <a:buChar char="•"/>
+        <a:defRPr sz="1800" kern="1200">
+          <a:solidFill>
+            <a:schemeClr val="tx1"/>
+          </a:solidFill>
+          <a:latin typeface="+mn-lt"/>
+          <a:ea typeface="+mn-ea"/>
+          <a:cs typeface="+mn-cs"/>
+        </a:defRPr>
+      </a:lvl4pPr>
+      <a:lvl5pPr marL="2057400" indent="-228600" algn="l" defTabSz="914400" rtl="0" eaLnBrk="1" latinLnBrk="0" hangingPunct="1">
+        <a:lnSpc>
+          <a:spcPct val="90000"/>
+        </a:lnSpc>
+        <a:spcBef>
+          <a:spcPts val="500"/>
+        </a:spcBef>
+        <a:buFont typeface="Arial" panose="020B0604020202020204" pitchFamily="34" charset="0"/>
+        <a:buChar char="•"/>
+        <a:defRPr sz="1800" kern="1200">
+          <a:solidFill>
+            <a:schemeClr val="tx1"/>
+          </a:solidFill>
+          <a:latin typeface="+mn-lt"/>
+          <a:ea typeface="+mn-ea"/>
+          <a:cs typeface="+mn-cs"/>
+        </a:defRPr>
+      </a:lvl5pPr>
+      <a:lvl6pPr marL="2514600" indent="-228600" algn="l" defTabSz="914400" rtl="0" eaLnBrk="1" latinLnBrk="0" hangingPunct="1">
+        <a:lnSpc>
+          <a:spcPct val="90000"/>
+        </a:lnSpc>
+        <a:spcBef>
+          <a:spcPts val="500"/>
+        </a:spcBef>
+        <a:buFont typeface="Arial" panose="020B0604020202020204" pitchFamily="34" charset="0"/>
+        <a:buChar char="•"/>
+        <a:defRPr sz="1800" kern="1200">
+          <a:solidFill>
+            <a:schemeClr val="tx1"/>
+          </a:solidFill>
+          <a:latin typeface="+mn-lt"/>
+          <a:ea typeface="+mn-ea"/>
+          <a:cs typeface="+mn-cs"/>
+        </a:defRPr>
+      </a:lvl6pPr>
+      <a:lvl7pPr marL="2971800" indent="-228600" algn="l" defTabSz="914400" rtl="0" eaLnBrk="1" latinLnBrk="0" hangingPunct="1">
+        <a:lnSpc>
+          <a:spcPct val="90000"/>
+        </a:lnSpc>
+        <a:spcBef>
+          <a:spcPts val="500"/>
+        </a:spcBef>
+        <a:buFont typeface="Arial" panose="020B0604020202020204" pitchFamily="34" charset="0"/>
+        <a:buChar char="•"/>
+        <a:defRPr sz="1800" kern="1200">
+          <a:solidFill>
+            <a:schemeClr val="tx1"/>
+          </a:solidFill>
+          <a:latin typeface="+mn-lt"/>
+          <a:ea typeface="+mn-ea"/>
+          <a:cs typeface="+mn-cs"/>
+        </a:defRPr>
+      </a:lvl7pPr>
+      <a:lvl8pPr marL="3429000" indent="-228600" algn="l" defTabSz="914400" rtl="0" eaLnBrk="1" latinLnBrk="0" hangingPunct="1">
+        <a:lnSpc>
+          <a:spcPct val="90000"/>
+        </a:lnSpc>
+        <a:spcBef>
+          <a:spcPts val="500"/>
+        </a:spcBef>
+        <a:buFont typeface="Arial" panose="020B0604020202020204" pitchFamily="34" charset="0"/>
+        <a:buChar char="•"/>
+        <a:defRPr sz="1800" kern="1200">
+          <a:solidFill>
+            <a:schemeClr val="tx1"/>
+          </a:solidFill>
+          <a:latin typeface="+mn-lt"/>
+          <a:ea typeface="+mn-ea"/>
+          <a:cs typeface="+mn-cs"/>
+        </a:defRPr>
+      </a:lvl8pPr>
+      <a:lvl9pPr marL="3886200" indent="-228600" algn="l" defTabSz="914400" rtl="0" eaLnBrk="1" latinLnBrk="0" hangingPunct="1">
+        <a:lnSpc>
+          <a:spcPct val="90000"/>
+        </a:lnSpc>
+        <a:spcBef>
+          <a:spcPts val="500"/>
+        </a:spcBef>
+        <a:buFont typeface="Arial" panose="020B0604020202020204" pitchFamily="34" charset="0"/>
+        <a:buChar char="•"/>
+        <a:defRPr sz="1800" kern="1200">
+          <a:solidFill>
+            <a:schemeClr val="tx1"/>
+          </a:solidFill>
+          <a:latin typeface="+mn-lt"/>
+          <a:ea typeface="+mn-ea"/>
+          <a:cs typeface="+mn-cs"/>
+        </a:defRPr>
+      </a:lvl9pPr>
+    </p:bodyStyle>
+    <p:otherStyle>
+      <a:defPPr>
+        <a:defRPr lang="es-CL"/>
+      </a:defPPr>
+      <a:lvl1pPr marL="0" algn="l" defTabSz="914400" rtl="0" eaLnBrk="1" latinLnBrk="0" hangingPunct="1">
+        <a:defRPr sz="1800" kern="1200">
+          <a:solidFill>
+            <a:schemeClr val="tx1"/>
+          </a:solidFill>
+          <a:latin typeface="+mn-lt"/>
+          <a:ea typeface="+mn-ea"/>
+          <a:cs typeface="+mn-cs"/>
+        </a:defRPr>
+      </a:lvl1pPr>
+      <a:lvl2pPr marL="457200" algn="l" defTabSz="914400" rtl="0" eaLnBrk="1" latinLnBrk="0" hangingPunct="1">
+        <a:defRPr sz="1800" kern="1200">
+          <a:solidFill>
+            <a:schemeClr val="tx1"/>
+          </a:solidFill>
+          <a:latin typeface="+mn-lt"/>
+          <a:ea typeface="+mn-ea"/>
+          <a:cs typeface="+mn-cs"/>
+        </a:defRPr>
+      </a:lvl2pPr>
+      <a:lvl3pPr marL="914400" algn="l" defTabSz="914400" rtl="0" eaLnBrk="1" latinLnBrk="0" hangingPunct="1">
+        <a:defRPr sz="1800" kern="1200">
+          <a:solidFill>
+            <a:schemeClr val="tx1"/>
+          </a:solidFill>
+          <a:latin typeface="+mn-lt"/>
+          <a:ea typeface="+mn-ea"/>
+          <a:cs typeface="+mn-cs"/>
+        </a:defRPr>
+      </a:lvl3pPr>
+      <a:lvl4pPr marL="1371600" algn="l" defTabSz="914400" rtl="0" eaLnBrk="1" latinLnBrk="0" hangingPunct="1">
+        <a:defRPr sz="1800" kern="1200">
+          <a:solidFill>
+            <a:schemeClr val="tx1"/>
+          </a:solidFill>
+          <a:latin typeface="+mn-lt"/>
+          <a:ea typeface="+mn-ea"/>
+          <a:cs typeface="+mn-cs"/>
+        </a:defRPr>
+      </a:lvl4pPr>
+      <a:lvl5pPr marL="1828800" algn="l" defTabSz="914400" rtl="0" eaLnBrk="1" latinLnBrk="0" hangingPunct="1">
+        <a:defRPr sz="1800" kern="1200">
+          <a:solidFill>
+            <a:schemeClr val="tx1"/>
+          </a:solidFill>
+          <a:latin typeface="+mn-lt"/>
+          <a:ea typeface="+mn-ea"/>
+          <a:cs typeface="+mn-cs"/>
+        </a:defRPr>
+      </a:lvl5pPr>
+      <a:lvl6pPr marL="2286000" algn="l" defTabSz="914400" rtl="0" eaLnBrk="1" latinLnBrk="0" hangingPunct="1">
+        <a:defRPr sz="1800" kern="1200">
+          <a:solidFill>
+            <a:schemeClr val="tx1"/>
+          </a:solidFill>
+          <a:latin typeface="+mn-lt"/>
+          <a:ea typeface="+mn-ea"/>
+          <a:cs typeface="+mn-cs"/>
+        </a:defRPr>
+      </a:lvl6pPr>
+      <a:lvl7pPr marL="2743200" algn="l" defTabSz="914400" rtl="0" eaLnBrk="1" latinLnBrk="0" hangingPunct="1">
+        <a:defRPr sz="1800" kern="1200">
+          <a:solidFill>
+            <a:schemeClr val="tx1"/>
+          </a:solidFill>
+          <a:latin typeface="+mn-lt"/>
+          <a:ea typeface="+mn-ea"/>
+          <a:cs typeface="+mn-cs"/>
+        </a:defRPr>
+      </a:lvl7pPr>
+      <a:lvl8pPr marL="3200400" algn="l" defTabSz="914400" rtl="0" eaLnBrk="1" latinLnBrk="0" hangingPunct="1">
+        <a:defRPr sz="1800" kern="1200">
+          <a:solidFill>
+            <a:schemeClr val="tx1"/>
+          </a:solidFill>
+          <a:latin typeface="+mn-lt"/>
+          <a:ea typeface="+mn-ea"/>
+          <a:cs typeface="+mn-cs"/>
+        </a:defRPr>
+      </a:lvl8pPr>
+      <a:lvl9pPr marL="3657600" algn="l" defTabSz="914400" rtl="0" eaLnBrk="1" latinLnBrk="0" hangingPunct="1">
+        <a:defRPr sz="1800" kern="1200">
+          <a:solidFill>
+            <a:schemeClr val="tx1"/>
+          </a:solidFill>
+          <a:latin typeface="+mn-lt"/>
+          <a:ea typeface="+mn-ea"/>
+          <a:cs typeface="+mn-cs"/>
+        </a:defRPr>
+      </a:lvl9pPr>
+    </p:otherStyle>
+  </p:txStyles>
 </p:sldMaster>
 </file>
 
 <file path=ppt/slides/slide1.xml><?xml version="1.0" encoding="utf-8"?>
-<p:sld xmlns:a="http://schemas.openxmlformats.org/drawingml/2006/main" xmlns:p="http://schemas.openxmlformats.org/presentationml/2006/main" xmlns:r="http://schemas.openxmlformats.org/officeDocument/2006/relationships" xmlns:p14="http://schemas.microsoft.com/office/powerpoint/2010/main" xmlns:p15="http://schemas.microsoft.com/office/powerpoint/2012/main" xmlns:mc="http://schemas.openxmlformats.org/markup-compatibility/2006">
+<p:sld xmlns:a="http://schemas.openxmlformats.org/drawingml/2006/main" xmlns:r="http://schemas.openxmlformats.org/officeDocument/2006/relationships" xmlns:p="http://schemas.openxmlformats.org/presentationml/2006/main">
   <p:cSld>
     <p:spTree>
       <p:nvGrpSpPr>
@@ -780,9 +1088,10 @@
           </a:ln>
         </p:spPr>
         <p:txBody>
-          <a:bodyPr lIns="0" rIns="0" tIns="0" bIns="0" anchor="ctr">
+          <a:bodyPr lIns="0" tIns="0" rIns="0" bIns="0" anchor="ctr">
             <a:normAutofit/>
           </a:bodyPr>
+          <a:lstStyle/>
           <a:p>
             <a:pPr indent="0" algn="ctr">
               <a:buNone/>
@@ -790,7 +1099,7 @@
             <a:r>
               <a:rPr lang="es-CL" sz="3300" b="0" u="none" strike="noStrike">
                 <a:solidFill>
-                  <a:srgbClr val="ffffff"/>
+                  <a:srgbClr val="FFFFFF"/>
                 </a:solidFill>
                 <a:effectLst/>
                 <a:uFillTx/>
@@ -798,20 +1107,12 @@
               </a:rPr>
               <a:t>Diploma</a:t>
             </a:r>
-            <a:endParaRPr lang="es-CL" sz="3300" b="0" u="none" strike="noStrike">
-              <a:solidFill>
-                <a:srgbClr val="ffffff"/>
-              </a:solidFill>
-              <a:effectLst/>
-              <a:uFillTx/>
-              <a:latin typeface="Arial"/>
-            </a:endParaRPr>
-          </a:p>
-        </p:txBody>
-      </p:sp>
-      <p:sp>
-        <p:nvSpPr>
-          <p:cNvPr id="11" name=""/>
+          </a:p>
+        </p:txBody>
+      </p:sp>
+      <p:sp>
+        <p:nvSpPr>
+          <p:cNvPr id="11" name="CuadroTexto 10"/>
           <p:cNvSpPr txBox="1"/>
           <p:nvPr/>
         </p:nvSpPr>
@@ -829,9 +1130,10 @@
           </a:ln>
         </p:spPr>
         <p:txBody>
-          <a:bodyPr lIns="90000" rIns="90000" tIns="45000" bIns="45000" anchor="t">
+          <a:bodyPr lIns="90000" tIns="45000" rIns="90000" bIns="45000" anchor="t">
             <a:spAutoFit/>
           </a:bodyPr>
+          <a:lstStyle/>
           <a:p>
             <a:r>
               <a:rPr lang="es-CL" sz="1800" b="0" u="none" strike="noStrike">
@@ -844,20 +1146,12 @@
               </a:rPr>
               <a:t>Este certificado es emitido a el sr/a : ${nombre} por realizar la capacitacion de:</a:t>
             </a:r>
-            <a:endParaRPr lang="es-CL" sz="1800" b="0" u="none" strike="noStrike">
-              <a:solidFill>
-                <a:srgbClr val="000000"/>
-              </a:solidFill>
-              <a:effectLst/>
-              <a:uFillTx/>
-              <a:latin typeface="Arial"/>
-            </a:endParaRPr>
-          </a:p>
-        </p:txBody>
-      </p:sp>
-      <p:sp>
-        <p:nvSpPr>
-          <p:cNvPr id="12" name=""/>
+          </a:p>
+        </p:txBody>
+      </p:sp>
+      <p:sp>
+        <p:nvSpPr>
+          <p:cNvPr id="12" name="CuadroTexto 11"/>
           <p:cNvSpPr txBox="1"/>
           <p:nvPr/>
         </p:nvSpPr>
@@ -875,9 +1169,10 @@
           </a:ln>
         </p:spPr>
         <p:txBody>
-          <a:bodyPr lIns="90000" rIns="90000" tIns="45000" bIns="45000" anchor="ctr" anchorCtr="1">
+          <a:bodyPr lIns="90000" tIns="45000" rIns="90000" bIns="45000" anchor="ctr" anchorCtr="1">
             <a:spAutoFit/>
           </a:bodyPr>
+          <a:lstStyle/>
           <a:p>
             <a:pPr algn="ctr"/>
             <a:r>
@@ -891,20 +1186,12 @@
               </a:rPr>
               <a:t>${curso}</a:t>
             </a:r>
-            <a:endParaRPr lang="es-CL" sz="4000" b="1" u="none" strike="noStrike">
-              <a:solidFill>
-                <a:srgbClr val="000000"/>
-              </a:solidFill>
-              <a:effectLst/>
-              <a:uFillTx/>
-              <a:latin typeface="Arial"/>
-            </a:endParaRPr>
-          </a:p>
-        </p:txBody>
-      </p:sp>
-      <p:sp>
-        <p:nvSpPr>
-          <p:cNvPr id="13" name=""/>
+          </a:p>
+        </p:txBody>
+      </p:sp>
+      <p:sp>
+        <p:nvSpPr>
+          <p:cNvPr id="13" name="CuadroTexto 12"/>
           <p:cNvSpPr txBox="1"/>
           <p:nvPr/>
         </p:nvSpPr>
@@ -922,12 +1209,13 @@
           </a:ln>
         </p:spPr>
         <p:txBody>
-          <a:bodyPr lIns="90000" rIns="90000" tIns="45000" bIns="45000" anchor="t">
+          <a:bodyPr lIns="90000" tIns="45000" rIns="90000" bIns="45000" anchor="t">
             <a:spAutoFit/>
           </a:bodyPr>
-          <a:p>
-            <a:r>
-              <a:rPr lang="es-CL" sz="1800" b="0" u="none" strike="noStrike">
+          <a:lstStyle/>
+          <a:p>
+            <a:r>
+              <a:rPr lang="es-CL" sz="1800" b="0" u="none" strike="noStrike" dirty="0">
                 <a:solidFill>
                   <a:srgbClr val="000000"/>
                 </a:solidFill>
@@ -935,22 +1223,58 @@
                 <a:uFillTx/>
                 <a:latin typeface="Arial"/>
               </a:rPr>
-              <a:t>Realizado en modalidad ${modalidad} y de duracion ${duracion}</a:t>
-            </a:r>
-            <a:endParaRPr lang="es-CL" sz="1800" b="0" u="none" strike="noStrike">
-              <a:solidFill>
-                <a:srgbClr val="000000"/>
-              </a:solidFill>
-              <a:effectLst/>
-              <a:uFillTx/>
-              <a:latin typeface="Arial"/>
-            </a:endParaRPr>
-          </a:p>
-        </p:txBody>
-      </p:sp>
-      <p:sp>
-        <p:nvSpPr>
-          <p:cNvPr id="14" name=""/>
+              <a:t>Realizado en modalidad ${modalidad} y de </a:t>
+            </a:r>
+            <a:r>
+              <a:rPr lang="es-CL" sz="1800" b="0" u="none" strike="noStrike" dirty="0" err="1">
+                <a:solidFill>
+                  <a:srgbClr val="000000"/>
+                </a:solidFill>
+                <a:effectLst/>
+                <a:uFillTx/>
+                <a:latin typeface="Arial"/>
+              </a:rPr>
+              <a:t>duracion</a:t>
+            </a:r>
+            <a:r>
+              <a:rPr lang="es-CL" sz="1800" b="0" u="none" strike="noStrike" dirty="0">
+                <a:solidFill>
+                  <a:srgbClr val="000000"/>
+                </a:solidFill>
+                <a:effectLst/>
+                <a:uFillTx/>
+                <a:latin typeface="Arial"/>
+              </a:rPr>
+              <a:t> ${</a:t>
+            </a:r>
+            <a:r>
+              <a:rPr lang="es-CL" sz="1800" b="0" u="none" strike="noStrike" dirty="0" err="1">
+                <a:solidFill>
+                  <a:srgbClr val="000000"/>
+                </a:solidFill>
+                <a:effectLst/>
+                <a:uFillTx/>
+                <a:latin typeface="Arial"/>
+              </a:rPr>
+              <a:t>duracion</a:t>
+            </a:r>
+            <a:r>
+              <a:rPr lang="es-CL" sz="1800" b="0" u="none" strike="noStrike" dirty="0">
+                <a:solidFill>
+                  <a:srgbClr val="000000"/>
+                </a:solidFill>
+                <a:effectLst/>
+                <a:uFillTx/>
+                <a:latin typeface="Arial"/>
+              </a:rPr>
+              <a:t>}</a:t>
+            </a:r>
+          </a:p>
+        </p:txBody>
+      </p:sp>
+      <p:sp>
+        <p:nvSpPr>
+          <p:cNvPr id="14" name="Rectángulo 13"/>
           <p:cNvSpPr/>
           <p:nvPr/>
         </p:nvSpPr>
@@ -968,15 +1292,22 @@
           </a:ln>
         </p:spPr>
         <p:style>
-          <a:lnRef idx="0"/>
-          <a:fillRef idx="0"/>
-          <a:effectRef idx="0"/>
+          <a:lnRef idx="0">
+            <a:scrgbClr r="0" g="0" b="0"/>
+          </a:lnRef>
+          <a:fillRef idx="0">
+            <a:scrgbClr r="0" g="0" b="0"/>
+          </a:fillRef>
+          <a:effectRef idx="0">
+            <a:scrgbClr r="0" g="0" b="0"/>
+          </a:effectRef>
           <a:fontRef idx="minor"/>
         </p:style>
         <p:txBody>
-          <a:bodyPr wrap="none" lIns="90000" rIns="90000" tIns="45000" bIns="45000" anchor="ctr">
+          <a:bodyPr wrap="none" lIns="90000" tIns="45000" rIns="90000" bIns="45000" anchor="ctr">
             <a:noAutofit/>
           </a:bodyPr>
+          <a:lstStyle/>
           <a:p>
             <a:pPr algn="ctr"/>
             <a:r>
@@ -990,20 +1321,12 @@
               </a:rPr>
               <a:t>${imagen_qr}</a:t>
             </a:r>
-            <a:endParaRPr lang="es-CL" sz="1800" b="0" u="none" strike="noStrike">
-              <a:solidFill>
-                <a:srgbClr val="000000"/>
-              </a:solidFill>
-              <a:effectLst/>
-              <a:uFillTx/>
-              <a:latin typeface="Arial"/>
-            </a:endParaRPr>
-          </a:p>
-        </p:txBody>
-      </p:sp>
-      <p:sp>
-        <p:nvSpPr>
-          <p:cNvPr id="15" name=""/>
+          </a:p>
+        </p:txBody>
+      </p:sp>
+      <p:sp>
+        <p:nvSpPr>
+          <p:cNvPr id="15" name="Rectángulo 14"/>
           <p:cNvSpPr/>
           <p:nvPr/>
         </p:nvSpPr>
@@ -1021,15 +1344,22 @@
           </a:ln>
         </p:spPr>
         <p:style>
-          <a:lnRef idx="0"/>
-          <a:fillRef idx="0"/>
-          <a:effectRef idx="0"/>
+          <a:lnRef idx="0">
+            <a:scrgbClr r="0" g="0" b="0"/>
+          </a:lnRef>
+          <a:fillRef idx="0">
+            <a:scrgbClr r="0" g="0" b="0"/>
+          </a:fillRef>
+          <a:effectRef idx="0">
+            <a:scrgbClr r="0" g="0" b="0"/>
+          </a:effectRef>
           <a:fontRef idx="minor"/>
         </p:style>
         <p:txBody>
-          <a:bodyPr wrap="none" lIns="90000" rIns="90000" tIns="45000" bIns="45000" anchor="ctr">
+          <a:bodyPr wrap="none" lIns="90000" tIns="45000" rIns="90000" bIns="45000" anchor="ctr">
             <a:noAutofit/>
           </a:bodyPr>
+          <a:lstStyle/>
           <a:p>
             <a:pPr algn="ctr"/>
             <a:r>
@@ -1043,81 +1373,112 @@
               </a:rPr>
               <a:t>${imagen_cliente}</a:t>
             </a:r>
-            <a:endParaRPr lang="es-CL" sz="1800" b="0" u="none" strike="noStrike">
-              <a:solidFill>
-                <a:srgbClr val="000000"/>
-              </a:solidFill>
-              <a:effectLst/>
-              <a:uFillTx/>
-              <a:latin typeface="Arial"/>
-            </a:endParaRPr>
+          </a:p>
+        </p:txBody>
+      </p:sp>
+      <p:sp>
+        <p:nvSpPr>
+          <p:cNvPr id="2" name="CuadroTexto 1">
+            <a:extLst>
+              <a:ext uri="{FF2B5EF4-FFF2-40B4-BE49-F238E27FC236}">
+                <a16:creationId xmlns:a16="http://schemas.microsoft.com/office/drawing/2014/main" id="{F4499C5E-AC26-8A50-3AE8-F3AFB91160DF}"/>
+              </a:ext>
+            </a:extLst>
+          </p:cNvPr>
+          <p:cNvSpPr txBox="1"/>
+          <p:nvPr/>
+        </p:nvSpPr>
+        <p:spPr>
+          <a:xfrm>
+            <a:off x="1800000" y="5040000"/>
+            <a:ext cx="5743800" cy="369332"/>
+          </a:xfrm>
+          <a:prstGeom prst="rect">
+            <a:avLst/>
+          </a:prstGeom>
+          <a:noFill/>
+        </p:spPr>
+        <p:txBody>
+          <a:bodyPr wrap="square" rtlCol="0">
+            <a:spAutoFit/>
+          </a:bodyPr>
+          <a:lstStyle/>
+          <a:p>
+            <a:r>
+              <a:rPr lang="es-MX" dirty="0"/>
+              <a:t>${</a:t>
+            </a:r>
+            <a:r>
+              <a:rPr lang="es-CL" dirty="0" err="1"/>
+              <a:t>datos_emision</a:t>
+            </a:r>
+            <a:r>
+              <a:rPr lang="es-MX" dirty="0"/>
+              <a:t>}</a:t>
+            </a:r>
+            <a:endParaRPr lang="es-CL" dirty="0"/>
           </a:p>
         </p:txBody>
       </p:sp>
     </p:spTree>
   </p:cSld>
-  <mc:AlternateContent>
-    <mc:Choice Requires="p14">
-      <p:transition spd="slow" p14:dur="2000"/>
-    </mc:Choice>
-    <mc:Fallback>
-      <p:transition spd="slow"/>
-    </mc:Fallback>
-  </mc:AlternateContent>
+  <p:clrMapOvr>
+    <a:masterClrMapping/>
+  </p:clrMapOvr>
 </p:sld>
 </file>
 
 <file path=ppt/theme/theme1.xml><?xml version="1.0" encoding="utf-8"?>
-<a:theme xmlns:a="http://schemas.openxmlformats.org/drawingml/2006/main" xmlns:r="http://schemas.openxmlformats.org/officeDocument/2006/relationships" name="Office">
+<a:theme xmlns:a="http://schemas.openxmlformats.org/drawingml/2006/main" name="Office">
   <a:themeElements>
     <a:clrScheme name="LibreOffice">
       <a:dk1>
         <a:srgbClr val="000000"/>
       </a:dk1>
       <a:lt1>
-        <a:srgbClr val="ffffff"/>
+        <a:srgbClr val="FFFFFF"/>
       </a:lt1>
       <a:dk2>
         <a:srgbClr val="000000"/>
       </a:dk2>
       <a:lt2>
-        <a:srgbClr val="ffffff"/>
+        <a:srgbClr val="FFFFFF"/>
       </a:lt2>
       <a:accent1>
-        <a:srgbClr val="18a303"/>
+        <a:srgbClr val="18A303"/>
       </a:accent1>
       <a:accent2>
-        <a:srgbClr val="0369a3"/>
+        <a:srgbClr val="0369A3"/>
       </a:accent2>
       <a:accent3>
-        <a:srgbClr val="a33e03"/>
+        <a:srgbClr val="A33E03"/>
       </a:accent3>
       <a:accent4>
-        <a:srgbClr val="8e03a3"/>
+        <a:srgbClr val="8E03A3"/>
       </a:accent4>
       <a:accent5>
-        <a:srgbClr val="c99c00"/>
+        <a:srgbClr val="C99C00"/>
       </a:accent5>
       <a:accent6>
-        <a:srgbClr val="c9211e"/>
+        <a:srgbClr val="C9211E"/>
       </a:accent6>
       <a:hlink>
-        <a:srgbClr val="0000ee"/>
+        <a:srgbClr val="0000EE"/>
       </a:hlink>
       <a:folHlink>
-        <a:srgbClr val="551a8b"/>
+        <a:srgbClr val="551A8B"/>
       </a:folHlink>
     </a:clrScheme>
     <a:fontScheme name="Office">
       <a:majorFont>
-        <a:latin typeface="Arial" pitchFamily="0" charset="1"/>
-        <a:ea typeface="DejaVu Sans" pitchFamily="0" charset="1"/>
-        <a:cs typeface="DejaVu Sans" pitchFamily="0" charset="1"/>
+        <a:latin typeface="Arial"/>
+        <a:ea typeface="DejaVu Sans"/>
+        <a:cs typeface="DejaVu Sans"/>
       </a:majorFont>
       <a:minorFont>
-        <a:latin typeface="Arial" pitchFamily="0" charset="1"/>
-        <a:ea typeface="DejaVu Sans" pitchFamily="0" charset="1"/>
-        <a:cs typeface="DejaVu Sans" pitchFamily="0" charset="1"/>
+        <a:latin typeface="Arial"/>
+        <a:ea typeface="DejaVu Sans"/>
+        <a:cs typeface="DejaVu Sans"/>
       </a:minorFont>
     </a:fontScheme>
     <a:fmtScheme>
@@ -1170,5 +1531,7 @@
       </a:bgFillStyleLst>
     </a:fmtScheme>
   </a:themeElements>
+  <a:objectDefaults/>
+  <a:extraClrSchemeLst/>
 </a:theme>
 </file>